--- a/classes/parte-5-explotacion-de-sistemas-y-binarios/131-ghidra-para-ingenieria-inversa/clase-131-presentacion.pptx
+++ b/classes/parte-5-explotacion-de-sistemas-y-binarios/131-ghidra-para-ingenieria-inversa/clase-131-presentacion.pptx
@@ -17,6 +17,9 @@
     <p:sldId id="265" r:id="rId16"/>
     <p:sldId id="266" r:id="rId17"/>
     <p:sldId id="267" r:id="rId18"/>
+    <p:sldId id="268" r:id="rId19"/>
+    <p:sldId id="269" r:id="rId20"/>
+    <p:sldId id="270" r:id="rId21"/>
   </p:sldIdLst>
   <p:sldSz cx="9144000" cy="6858000" type="screen4x3"/>
   <p:notesSz cx="6858000" cy="9144000"/>
@@ -3198,7 +3201,7 @@
                   <a:srgbClr val="0B3D2E"/>
                 </a:solidFill>
               </a:rPr>
-              <a:t>⚠️ Errores comunes</a:t>
+              <a:t>✍️ Ejercicios</a:t>
             </a:r>
           </a:p>
         </p:txBody>
@@ -3236,67 +3239,82 @@
                   <a:srgbClr val="22282E"/>
                 </a:solidFill>
               </a:rPr>
-              <a:t>•  Decompilado ilegible — Renombra/retipa variables; define structs</a:t>
-            </a:r>
-          </a:p>
-          <a:p>
-            <a:pPr>
-              <a:spcAft>
-                <a:spcPts val="600"/>
-              </a:spcAft>
-            </a:pPr>
-            <a:r>
-              <a:rPr sz="1500">
-                <a:solidFill>
-                  <a:srgbClr val="22282E"/>
-                </a:solidFill>
-              </a:rPr>
-              <a:t>•  Ghidra no arranca — Falta JDK compatible; instala el JDK requerido</a:t>
-            </a:r>
-          </a:p>
-          <a:p>
-            <a:pPr>
-              <a:spcAft>
-                <a:spcPts val="600"/>
-              </a:spcAft>
-            </a:pPr>
-            <a:r>
-              <a:rPr sz="1500">
-                <a:solidFill>
-                  <a:srgbClr val="22282E"/>
-                </a:solidFill>
-              </a:rPr>
-              <a:t>•  Funciones no reconocidas — Reejecuta auto-análisis o define funciones manualmente</a:t>
-            </a:r>
-          </a:p>
-          <a:p>
-            <a:pPr>
-              <a:spcAft>
-                <a:spcPts val="600"/>
-              </a:spcAft>
-            </a:pPr>
-            <a:r>
-              <a:rPr sz="1500">
-                <a:solidFill>
-                  <a:srgbClr val="22282E"/>
-                </a:solidFill>
-              </a:rPr>
-              <a:t>•  El decompilador "miente" — Contrasta con el Listing (ASM) real</a:t>
-            </a:r>
-          </a:p>
-          <a:p>
-            <a:pPr>
-              <a:spcAft>
-                <a:spcPts val="600"/>
-              </a:spcAft>
-            </a:pPr>
-            <a:r>
-              <a:rPr sz="1500">
-                <a:solidFill>
-                  <a:srgbClr val="22282E"/>
-                </a:solidFill>
-              </a:rPr>
-              <a:t>•  Strings no aparecen — Están cifradas; combínalo con análisis dinámico</a:t>
+              <a:t>•  Renombra y comenta main hasta que el pseudo-C sea autoexplicativo.</a:t>
+            </a:r>
+          </a:p>
+          <a:p>
+            <a:pPr>
+              <a:spcAft>
+                <a:spcPts val="600"/>
+              </a:spcAft>
+            </a:pPr>
+            <a:r>
+              <a:rPr sz="1500">
+                <a:solidFill>
+                  <a:srgbClr val="22282E"/>
+                </a:solidFill>
+              </a:rPr>
+              <a:t>•  Define una struct para un objeto que el binario usa y aplícala.</a:t>
+            </a:r>
+          </a:p>
+          <a:p>
+            <a:pPr>
+              <a:spcAft>
+                <a:spcPts val="600"/>
+              </a:spcAft>
+            </a:pPr>
+            <a:r>
+              <a:rPr sz="1500">
+                <a:solidFill>
+                  <a:srgbClr val="22282E"/>
+                </a:solidFill>
+              </a:rPr>
+              <a:t>•  Usa xrefs para encontrar todas las llamadas a la función de validación.</a:t>
+            </a:r>
+          </a:p>
+          <a:p>
+            <a:pPr>
+              <a:spcAft>
+                <a:spcPts val="600"/>
+              </a:spcAft>
+            </a:pPr>
+            <a:r>
+              <a:rPr sz="1500">
+                <a:solidFill>
+                  <a:srgbClr val="22282E"/>
+                </a:solidFill>
+              </a:rPr>
+              <a:t>•  Extrae con un script la lista de imports del binario.</a:t>
+            </a:r>
+          </a:p>
+          <a:p>
+            <a:pPr>
+              <a:spcAft>
+                <a:spcPts val="600"/>
+              </a:spcAft>
+            </a:pPr>
+            <a:r>
+              <a:rPr sz="1500">
+                <a:solidFill>
+                  <a:srgbClr val="22282E"/>
+                </a:solidFill>
+              </a:rPr>
+              <a:t>•  Compara el Listing y el Decompiler en una función donde difieran.</a:t>
+            </a:r>
+          </a:p>
+          <a:p>
+            <a:pPr>
+              <a:spcAft>
+                <a:spcPts val="600"/>
+              </a:spcAft>
+            </a:pPr>
+            <a:r>
+              <a:rPr sz="1500">
+                <a:solidFill>
+                  <a:srgbClr val="22282E"/>
+                </a:solidFill>
+              </a:rPr>
+              <a:t>•  Exporta un informe/anotaciones del análisis.</a:t>
             </a:r>
           </a:p>
         </p:txBody>
@@ -3347,7 +3365,7 @@
                   <a:srgbClr val="0B3D2E"/>
                 </a:solidFill>
               </a:rPr>
-              <a:t>❓ Preguntas frecuentes</a:t>
+              <a:t>📝 Reto verificable</a:t>
             </a:r>
           </a:p>
         </p:txBody>
@@ -3385,67 +3403,52 @@
                   <a:srgbClr val="22282E"/>
                 </a:solidFill>
               </a:rPr>
-              <a:t>•  ❓ ¿Ghidra o IDA? Ghidra es gratuito y muy capaz; IDA es el estándar comercial. Aprende ambos si</a:t>
-            </a:r>
-          </a:p>
-          <a:p>
-            <a:pPr>
-              <a:spcAft>
-                <a:spcPts val="600"/>
-              </a:spcAft>
-            </a:pPr>
-            <a:r>
-              <a:rPr sz="1500">
-                <a:solidFill>
-                  <a:srgbClr val="22282E"/>
-                </a:solidFill>
-              </a:rPr>
-              <a:t>•  puedes (IDA/radare2 en la clase 132).</a:t>
-            </a:r>
-          </a:p>
-          <a:p>
-            <a:pPr>
-              <a:spcAft>
-                <a:spcPts val="600"/>
-              </a:spcAft>
-            </a:pPr>
-            <a:r>
-              <a:rPr sz="1500">
-                <a:solidFill>
-                  <a:srgbClr val="22282E"/>
-                </a:solidFill>
-              </a:rPr>
-              <a:t>•  ❓ ¿El decompilado es fiable? Es una aproximación; para detalles finos (offsets, flags) confía en</a:t>
-            </a:r>
-          </a:p>
-          <a:p>
-            <a:pPr>
-              <a:spcAft>
-                <a:spcPts val="600"/>
-              </a:spcAft>
-            </a:pPr>
-            <a:r>
-              <a:rPr sz="1500">
-                <a:solidFill>
-                  <a:srgbClr val="22282E"/>
-                </a:solidFill>
-              </a:rPr>
-              <a:t>•  el Listing.</a:t>
-            </a:r>
-          </a:p>
-          <a:p>
-            <a:pPr>
-              <a:spcAft>
-                <a:spcPts val="600"/>
-              </a:spcAft>
-            </a:pPr>
-            <a:r>
-              <a:rPr sz="1500">
-                <a:solidFill>
-                  <a:srgbClr val="22282E"/>
-                </a:solidFill>
-              </a:rPr>
-              <a:t>•  ❓ ¿Puedo automatizar? Sí, con GhidraScript o el modo headless (analyzeHeadless) para lotes.</a:t>
+              <a:t>•  Usando solo Ghidra (sin ejecutar hasta el final), deduce la clave válida de un crackme y luego</a:t>
+            </a:r>
+          </a:p>
+          <a:p>
+            <a:pPr>
+              <a:spcAft>
+                <a:spcPts val="600"/>
+              </a:spcAft>
+            </a:pPr>
+            <a:r>
+              <a:rPr sz="1500">
+                <a:solidFill>
+                  <a:srgbClr val="22282E"/>
+                </a:solidFill>
+              </a:rPr>
+              <a:t>•  compruébala ejecutándolo.</a:t>
+            </a:r>
+          </a:p>
+          <a:p>
+            <a:pPr>
+              <a:spcAft>
+                <a:spcPts val="600"/>
+              </a:spcAft>
+            </a:pPr>
+            <a:r>
+              <a:rPr sz="1500">
+                <a:solidFill>
+                  <a:srgbClr val="22282E"/>
+                </a:solidFill>
+              </a:rPr>
+              <a:t>•  Criterio de aceptación: el crackme acepta la clave que dedujiste del pseudo-C, y documentas en</a:t>
+            </a:r>
+          </a:p>
+          <a:p>
+            <a:pPr>
+              <a:spcAft>
+                <a:spcPts val="600"/>
+              </a:spcAft>
+            </a:pPr>
+            <a:r>
+              <a:rPr sz="1500">
+                <a:solidFill>
+                  <a:srgbClr val="22282E"/>
+                </a:solidFill>
+              </a:rPr>
+              <a:t>•  comentarios de Ghidra cómo llegaste a ella.</a:t>
             </a:r>
           </a:p>
         </p:txBody>
@@ -3496,7 +3499,7 @@
                   <a:srgbClr val="0B3D2E"/>
                 </a:solidFill>
               </a:rPr>
-              <a:t>🔗 Referencias</a:t>
+              <a:t>⚠️ Errores comunes</a:t>
             </a:r>
           </a:p>
         </p:txBody>
@@ -3534,6 +3537,304 @@
                   <a:srgbClr val="22282E"/>
                 </a:solidFill>
               </a:rPr>
+              <a:t>•  Decompilado ilegible — Renombra/retipa variables; define structs</a:t>
+            </a:r>
+          </a:p>
+          <a:p>
+            <a:pPr>
+              <a:spcAft>
+                <a:spcPts val="600"/>
+              </a:spcAft>
+            </a:pPr>
+            <a:r>
+              <a:rPr sz="1500">
+                <a:solidFill>
+                  <a:srgbClr val="22282E"/>
+                </a:solidFill>
+              </a:rPr>
+              <a:t>•  Ghidra no arranca — Falta JDK compatible; instala el JDK requerido</a:t>
+            </a:r>
+          </a:p>
+          <a:p>
+            <a:pPr>
+              <a:spcAft>
+                <a:spcPts val="600"/>
+              </a:spcAft>
+            </a:pPr>
+            <a:r>
+              <a:rPr sz="1500">
+                <a:solidFill>
+                  <a:srgbClr val="22282E"/>
+                </a:solidFill>
+              </a:rPr>
+              <a:t>•  Funciones no reconocidas — Reejecuta auto-análisis o define funciones manualmente</a:t>
+            </a:r>
+          </a:p>
+          <a:p>
+            <a:pPr>
+              <a:spcAft>
+                <a:spcPts val="600"/>
+              </a:spcAft>
+            </a:pPr>
+            <a:r>
+              <a:rPr sz="1500">
+                <a:solidFill>
+                  <a:srgbClr val="22282E"/>
+                </a:solidFill>
+              </a:rPr>
+              <a:t>•  El decompilador "miente" — Contrasta con el Listing (ASM) real</a:t>
+            </a:r>
+          </a:p>
+          <a:p>
+            <a:pPr>
+              <a:spcAft>
+                <a:spcPts val="600"/>
+              </a:spcAft>
+            </a:pPr>
+            <a:r>
+              <a:rPr sz="1500">
+                <a:solidFill>
+                  <a:srgbClr val="22282E"/>
+                </a:solidFill>
+              </a:rPr>
+              <a:t>•  Strings no aparecen — Están cifradas; combínalo con análisis dinámico</a:t>
+            </a:r>
+          </a:p>
+        </p:txBody>
+      </p:sp>
+    </p:spTree>
+  </p:cSld>
+  <p:clrMapOvr>
+    <a:masterClrMapping/>
+  </p:clrMapOvr>
+</p:sld>
+</file>
+
+<file path=ppt/slides/slide13.xml><?xml version="1.0" encoding="utf-8"?>
+<p:sld xmlns:a="http://schemas.openxmlformats.org/drawingml/2006/main" xmlns:p="http://schemas.openxmlformats.org/presentationml/2006/main" xmlns:r="http://schemas.openxmlformats.org/officeDocument/2006/relationships">
+  <p:cSld>
+    <p:spTree>
+      <p:nvGrpSpPr>
+        <p:cNvPr id="1" name=""/>
+        <p:cNvGrpSpPr/>
+        <p:nvPr/>
+      </p:nvGrpSpPr>
+      <p:grpSpPr/>
+      <p:sp>
+        <p:nvSpPr>
+          <p:cNvPr id="2" name="TextBox 1"/>
+          <p:cNvSpPr txBox="1"/>
+          <p:nvPr/>
+        </p:nvSpPr>
+        <p:spPr>
+          <a:xfrm>
+            <a:off x="457200" y="320040"/>
+            <a:ext cx="8229600" cy="822960"/>
+          </a:xfrm>
+          <a:prstGeom prst="rect">
+            <a:avLst/>
+          </a:prstGeom>
+          <a:noFill/>
+        </p:spPr>
+        <p:txBody>
+          <a:bodyPr wrap="square">
+            <a:spAutoFit/>
+          </a:bodyPr>
+          <a:lstStyle/>
+          <a:p>
+            <a:r>
+              <a:rPr sz="2600" b="1">
+                <a:solidFill>
+                  <a:srgbClr val="0B3D2E"/>
+                </a:solidFill>
+              </a:rPr>
+              <a:t>❓ Preguntas frecuentes</a:t>
+            </a:r>
+          </a:p>
+        </p:txBody>
+      </p:sp>
+      <p:sp>
+        <p:nvSpPr>
+          <p:cNvPr id="3" name="TextBox 2"/>
+          <p:cNvSpPr txBox="1"/>
+          <p:nvPr/>
+        </p:nvSpPr>
+        <p:spPr>
+          <a:xfrm>
+            <a:off x="457200" y="1280160"/>
+            <a:ext cx="8229600" cy="4937760"/>
+          </a:xfrm>
+          <a:prstGeom prst="rect">
+            <a:avLst/>
+          </a:prstGeom>
+          <a:noFill/>
+        </p:spPr>
+        <p:txBody>
+          <a:bodyPr wrap="square">
+            <a:spAutoFit/>
+          </a:bodyPr>
+          <a:lstStyle/>
+          <a:p>
+            <a:pPr>
+              <a:spcAft>
+                <a:spcPts val="600"/>
+              </a:spcAft>
+            </a:pPr>
+            <a:r>
+              <a:rPr sz="1500">
+                <a:solidFill>
+                  <a:srgbClr val="22282E"/>
+                </a:solidFill>
+              </a:rPr>
+              <a:t>•  ❓ ¿Ghidra o IDA? Ghidra es gratuito y muy capaz; IDA es el estándar comercial. Aprende ambos si</a:t>
+            </a:r>
+          </a:p>
+          <a:p>
+            <a:pPr>
+              <a:spcAft>
+                <a:spcPts val="600"/>
+              </a:spcAft>
+            </a:pPr>
+            <a:r>
+              <a:rPr sz="1500">
+                <a:solidFill>
+                  <a:srgbClr val="22282E"/>
+                </a:solidFill>
+              </a:rPr>
+              <a:t>•  puedes (IDA/radare2 en la clase 132).</a:t>
+            </a:r>
+          </a:p>
+          <a:p>
+            <a:pPr>
+              <a:spcAft>
+                <a:spcPts val="600"/>
+              </a:spcAft>
+            </a:pPr>
+            <a:r>
+              <a:rPr sz="1500">
+                <a:solidFill>
+                  <a:srgbClr val="22282E"/>
+                </a:solidFill>
+              </a:rPr>
+              <a:t>•  ❓ ¿El decompilado es fiable? Es una aproximación; para detalles finos (offsets, flags) confía en</a:t>
+            </a:r>
+          </a:p>
+          <a:p>
+            <a:pPr>
+              <a:spcAft>
+                <a:spcPts val="600"/>
+              </a:spcAft>
+            </a:pPr>
+            <a:r>
+              <a:rPr sz="1500">
+                <a:solidFill>
+                  <a:srgbClr val="22282E"/>
+                </a:solidFill>
+              </a:rPr>
+              <a:t>•  el Listing.</a:t>
+            </a:r>
+          </a:p>
+          <a:p>
+            <a:pPr>
+              <a:spcAft>
+                <a:spcPts val="600"/>
+              </a:spcAft>
+            </a:pPr>
+            <a:r>
+              <a:rPr sz="1500">
+                <a:solidFill>
+                  <a:srgbClr val="22282E"/>
+                </a:solidFill>
+              </a:rPr>
+              <a:t>•  ❓ ¿Puedo automatizar? Sí, con GhidraScript o el modo headless (analyzeHeadless) para lotes.</a:t>
+            </a:r>
+          </a:p>
+        </p:txBody>
+      </p:sp>
+    </p:spTree>
+  </p:cSld>
+  <p:clrMapOvr>
+    <a:masterClrMapping/>
+  </p:clrMapOvr>
+</p:sld>
+</file>
+
+<file path=ppt/slides/slide14.xml><?xml version="1.0" encoding="utf-8"?>
+<p:sld xmlns:a="http://schemas.openxmlformats.org/drawingml/2006/main" xmlns:p="http://schemas.openxmlformats.org/presentationml/2006/main" xmlns:r="http://schemas.openxmlformats.org/officeDocument/2006/relationships">
+  <p:cSld>
+    <p:spTree>
+      <p:nvGrpSpPr>
+        <p:cNvPr id="1" name=""/>
+        <p:cNvGrpSpPr/>
+        <p:nvPr/>
+      </p:nvGrpSpPr>
+      <p:grpSpPr/>
+      <p:sp>
+        <p:nvSpPr>
+          <p:cNvPr id="2" name="TextBox 1"/>
+          <p:cNvSpPr txBox="1"/>
+          <p:nvPr/>
+        </p:nvSpPr>
+        <p:spPr>
+          <a:xfrm>
+            <a:off x="457200" y="320040"/>
+            <a:ext cx="8229600" cy="822960"/>
+          </a:xfrm>
+          <a:prstGeom prst="rect">
+            <a:avLst/>
+          </a:prstGeom>
+          <a:noFill/>
+        </p:spPr>
+        <p:txBody>
+          <a:bodyPr wrap="square">
+            <a:spAutoFit/>
+          </a:bodyPr>
+          <a:lstStyle/>
+          <a:p>
+            <a:r>
+              <a:rPr sz="2600" b="1">
+                <a:solidFill>
+                  <a:srgbClr val="0B3D2E"/>
+                </a:solidFill>
+              </a:rPr>
+              <a:t>🔗 Referencias</a:t>
+            </a:r>
+          </a:p>
+        </p:txBody>
+      </p:sp>
+      <p:sp>
+        <p:nvSpPr>
+          <p:cNvPr id="3" name="TextBox 2"/>
+          <p:cNvSpPr txBox="1"/>
+          <p:nvPr/>
+        </p:nvSpPr>
+        <p:spPr>
+          <a:xfrm>
+            <a:off x="457200" y="1280160"/>
+            <a:ext cx="8229600" cy="4937760"/>
+          </a:xfrm>
+          <a:prstGeom prst="rect">
+            <a:avLst/>
+          </a:prstGeom>
+          <a:noFill/>
+        </p:spPr>
+        <p:txBody>
+          <a:bodyPr wrap="square">
+            <a:spAutoFit/>
+          </a:bodyPr>
+          <a:lstStyle/>
+          <a:p>
+            <a:pPr>
+              <a:spcAft>
+                <a:spcPts val="600"/>
+              </a:spcAft>
+            </a:pPr>
+            <a:r>
+              <a:rPr sz="1500">
+                <a:solidFill>
+                  <a:srgbClr val="22282E"/>
+                </a:solidFill>
+              </a:rPr>
               <a:t>•  Ghidra (NSA) — &lt;https://ghidra-sre.org/&gt;</a:t>
             </a:r>
           </a:p>
@@ -3584,6 +3885,81 @@
           </a:p>
         </p:txBody>
       </p:sp>
+    </p:spTree>
+  </p:cSld>
+  <p:clrMapOvr>
+    <a:masterClrMapping/>
+  </p:clrMapOvr>
+</p:sld>
+</file>
+
+<file path=ppt/slides/slide15.xml><?xml version="1.0" encoding="utf-8"?>
+<p:sld xmlns:a="http://schemas.openxmlformats.org/drawingml/2006/main" xmlns:p="http://schemas.openxmlformats.org/presentationml/2006/main" xmlns:r="http://schemas.openxmlformats.org/officeDocument/2006/relationships">
+  <p:cSld>
+    <p:spTree>
+      <p:nvGrpSpPr>
+        <p:cNvPr id="1" name=""/>
+        <p:cNvGrpSpPr/>
+        <p:nvPr/>
+      </p:nvGrpSpPr>
+      <p:grpSpPr/>
+      <p:sp>
+        <p:nvSpPr>
+          <p:cNvPr id="2" name="TextBox 1"/>
+          <p:cNvSpPr txBox="1"/>
+          <p:nvPr/>
+        </p:nvSpPr>
+        <p:spPr>
+          <a:xfrm>
+            <a:off x="457200" y="274320"/>
+            <a:ext cx="8229600" cy="640080"/>
+          </a:xfrm>
+          <a:prstGeom prst="rect">
+            <a:avLst/>
+          </a:prstGeom>
+          <a:noFill/>
+        </p:spPr>
+        <p:txBody>
+          <a:bodyPr wrap="square">
+            <a:spAutoFit/>
+          </a:bodyPr>
+          <a:lstStyle/>
+          <a:p>
+            <a:r>
+              <a:rPr sz="2200" b="1">
+                <a:solidFill>
+                  <a:srgbClr val="0B3D2E"/>
+                </a:solidFill>
+              </a:rPr>
+              <a:t>Diagrama de la clase</a:t>
+            </a:r>
+          </a:p>
+        </p:txBody>
+      </p:sp>
+      <p:pic>
+        <p:nvPicPr>
+          <p:cNvPr id="3" name="Picture 2" descr="7c5fa12c1381ecf0.png"/>
+          <p:cNvPicPr>
+            <a:picLocks noChangeAspect="1"/>
+          </p:cNvPicPr>
+          <p:nvPr/>
+        </p:nvPicPr>
+        <p:blipFill>
+          <a:blip r:embed="rId2"/>
+          <a:stretch>
+            <a:fillRect/>
+          </a:stretch>
+        </p:blipFill>
+        <p:spPr>
+          <a:xfrm>
+            <a:off x="457200" y="2857500"/>
+            <a:ext cx="8229600" cy="1783080"/>
+          </a:xfrm>
+          <a:prstGeom prst="rect">
+            <a:avLst/>
+          </a:prstGeom>
+        </p:spPr>
+      </p:pic>
     </p:spTree>
   </p:cSld>
   <p:clrMapOvr>
@@ -4107,7 +4483,7 @@
                   <a:srgbClr val="0B3D2E"/>
                 </a:solidFill>
               </a:rPr>
-              <a:t>📖 Definiciones y características</a:t>
+              <a:t>🧠 Explicación en profundidad</a:t>
             </a:r>
           </a:p>
         </p:txBody>
@@ -4145,97 +4521,97 @@
                   <a:srgbClr val="22282E"/>
                 </a:solidFill>
               </a:rPr>
-              <a:t>•  Ghidra: SRE framework de código abierto con decompilador propio. Clave: gratuito y</a:t>
-            </a:r>
-          </a:p>
-          <a:p>
-            <a:pPr>
-              <a:spcAft>
-                <a:spcPts val="600"/>
-              </a:spcAft>
-            </a:pPr>
-            <a:r>
-              <a:rPr sz="1500">
-                <a:solidFill>
-                  <a:srgbClr val="22282E"/>
-                </a:solidFill>
-              </a:rPr>
-              <a:t>•  multiplataforma; el decompilador rivaliza con IDA.</a:t>
-            </a:r>
-          </a:p>
-          <a:p>
-            <a:pPr>
-              <a:spcAft>
-                <a:spcPts val="600"/>
-              </a:spcAft>
-            </a:pPr>
-            <a:r>
-              <a:rPr sz="1500">
-                <a:solidFill>
-                  <a:srgbClr val="22282E"/>
-                </a:solidFill>
-              </a:rPr>
-              <a:t>•  Decompilador: genera pseudo-C a partir del ensamblado. Clave: mejora enormemente al renombrar y</a:t>
-            </a:r>
-          </a:p>
-          <a:p>
-            <a:pPr>
-              <a:spcAft>
-                <a:spcPts val="600"/>
-              </a:spcAft>
-            </a:pPr>
-            <a:r>
-              <a:rPr sz="1500">
-                <a:solidFill>
-                  <a:srgbClr val="22282E"/>
-                </a:solidFill>
-              </a:rPr>
-              <a:t>•  retipar variables.</a:t>
-            </a:r>
-          </a:p>
-          <a:p>
-            <a:pPr>
-              <a:spcAft>
-                <a:spcPts val="600"/>
-              </a:spcAft>
-            </a:pPr>
-            <a:r>
-              <a:rPr sz="1500">
-                <a:solidFill>
-                  <a:srgbClr val="22282E"/>
-                </a:solidFill>
-              </a:rPr>
-              <a:t>•  Listing: vista de desensamblado con direcciones, bytes y comentarios. Clave: fuente de verdad</a:t>
-            </a:r>
-          </a:p>
-          <a:p>
-            <a:pPr>
-              <a:spcAft>
-                <a:spcPts val="600"/>
-              </a:spcAft>
-            </a:pPr>
-            <a:r>
-              <a:rPr sz="1500">
-                <a:solidFill>
-                  <a:srgbClr val="22282E"/>
-                </a:solidFill>
-              </a:rPr>
-              <a:t>•  cuando el decompilador se equivoca.</a:t>
-            </a:r>
-          </a:p>
-          <a:p>
-            <a:pPr>
-              <a:spcAft>
-                <a:spcPts val="600"/>
-              </a:spcAft>
-            </a:pPr>
-            <a:r>
-              <a:rPr sz="1500">
-                <a:solidFill>
-                  <a:srgbClr val="22282E"/>
-                </a:solidFill>
-              </a:rPr>
-              <a:t>•  Xref (cross-reference): enlace entre una dirección y quienes la referencian. Clave: Ctrl+Shift+F</a:t>
+              <a:t>•  Ghidra es la suite de ingeniería inversa desarrollada por la NSA y liberada como código abierto</a:t>
+            </a:r>
+          </a:p>
+          <a:p>
+            <a:pPr>
+              <a:spcAft>
+                <a:spcPts val="600"/>
+              </a:spcAft>
+            </a:pPr>
+            <a:r>
+              <a:rPr sz="1500">
+                <a:solidFill>
+                  <a:srgbClr val="22282E"/>
+                </a:solidFill>
+              </a:rPr>
+              <a:t>•  en 2019, y su aparición democratizó una capacidad que antes costaba miles de dólares: un</a:t>
+            </a:r>
+          </a:p>
+          <a:p>
+            <a:pPr>
+              <a:spcAft>
+                <a:spcPts val="600"/>
+              </a:spcAft>
+            </a:pPr>
+            <a:r>
+              <a:rPr sz="1500">
+                <a:solidFill>
+                  <a:srgbClr val="22282E"/>
+                </a:solidFill>
+              </a:rPr>
+              <a:t>•  decompilador de calidad profesional. Su valor central es precisamente ese: además de</a:t>
+            </a:r>
+          </a:p>
+          <a:p>
+            <a:pPr>
+              <a:spcAft>
+                <a:spcPts val="600"/>
+              </a:spcAft>
+            </a:pPr>
+            <a:r>
+              <a:rPr sz="1500">
+                <a:solidFill>
+                  <a:srgbClr val="22282E"/>
+                </a:solidFill>
+              </a:rPr>
+              <a:t>•  desensamblar (mostrar el ensamblador), Ghidra decompila, es decir, reconstruye una</a:t>
+            </a:r>
+          </a:p>
+          <a:p>
+            <a:pPr>
+              <a:spcAft>
+                <a:spcPts val="600"/>
+              </a:spcAft>
+            </a:pPr>
+            <a:r>
+              <a:rPr sz="1500">
+                <a:solidFill>
+                  <a:srgbClr val="22282E"/>
+                </a:solidFill>
+              </a:rPr>
+              <a:t>•  aproximación en pseudo-C del código original. Leer if (strcmp(input, "s3cr3t") == 0) es</a:t>
+            </a:r>
+          </a:p>
+          <a:p>
+            <a:pPr>
+              <a:spcAft>
+                <a:spcPts val="600"/>
+              </a:spcAft>
+            </a:pPr>
+            <a:r>
+              <a:rPr sz="1500">
+                <a:solidFill>
+                  <a:srgbClr val="22282E"/>
+                </a:solidFill>
+              </a:rPr>
+              <a:t>•  incomparablemente más rápido que descifrar veinte instrucciones de ensamblador que hacen lo mismo, y</a:t>
+            </a:r>
+          </a:p>
+          <a:p>
+            <a:pPr>
+              <a:spcAft>
+                <a:spcPts val="600"/>
+              </a:spcAft>
+            </a:pPr>
+            <a:r>
+              <a:rPr sz="1500">
+                <a:solidFill>
+                  <a:srgbClr val="22282E"/>
+                </a:solidFill>
+              </a:rPr>
+              <a:t>•  por eso el decompilador es la herramienta que hace la RE abordable para quien no vive en el</a:t>
             </a:r>
           </a:p>
         </p:txBody>
@@ -4286,7 +4662,7 @@
                   <a:srgbClr val="0B3D2E"/>
                 </a:solidFill>
               </a:rPr>
-              <a:t>🧰 Herramientas y preparación</a:t>
+              <a:t>📖 Definiciones y características</a:t>
             </a:r>
           </a:p>
         </p:txBody>
@@ -4324,22 +4700,97 @@
                   <a:srgbClr val="22282E"/>
                 </a:solidFill>
               </a:rPr>
-              <a:t>•  ./ghidraRun</a:t>
-            </a:r>
-          </a:p>
-          <a:p>
-            <a:pPr>
-              <a:spcAft>
-                <a:spcPts val="600"/>
-              </a:spcAft>
-            </a:pPr>
-            <a:r>
-              <a:rPr sz="1500">
-                <a:solidFill>
-                  <a:srgbClr val="22282E"/>
-                </a:solidFill>
-              </a:rPr>
-              <a:t>•  Ten a mano un crackme de práctica (por ejemplo, el de la clase 130).</a:t>
+              <a:t>•  Ghidra: SRE framework de código abierto con decompilador propio. Clave: gratuito y</a:t>
+            </a:r>
+          </a:p>
+          <a:p>
+            <a:pPr>
+              <a:spcAft>
+                <a:spcPts val="600"/>
+              </a:spcAft>
+            </a:pPr>
+            <a:r>
+              <a:rPr sz="1500">
+                <a:solidFill>
+                  <a:srgbClr val="22282E"/>
+                </a:solidFill>
+              </a:rPr>
+              <a:t>•  multiplataforma; el decompilador rivaliza con IDA.</a:t>
+            </a:r>
+          </a:p>
+          <a:p>
+            <a:pPr>
+              <a:spcAft>
+                <a:spcPts val="600"/>
+              </a:spcAft>
+            </a:pPr>
+            <a:r>
+              <a:rPr sz="1500">
+                <a:solidFill>
+                  <a:srgbClr val="22282E"/>
+                </a:solidFill>
+              </a:rPr>
+              <a:t>•  Decompilador: genera pseudo-C a partir del ensamblado. Clave: mejora enormemente al renombrar y</a:t>
+            </a:r>
+          </a:p>
+          <a:p>
+            <a:pPr>
+              <a:spcAft>
+                <a:spcPts val="600"/>
+              </a:spcAft>
+            </a:pPr>
+            <a:r>
+              <a:rPr sz="1500">
+                <a:solidFill>
+                  <a:srgbClr val="22282E"/>
+                </a:solidFill>
+              </a:rPr>
+              <a:t>•  retipar variables.</a:t>
+            </a:r>
+          </a:p>
+          <a:p>
+            <a:pPr>
+              <a:spcAft>
+                <a:spcPts val="600"/>
+              </a:spcAft>
+            </a:pPr>
+            <a:r>
+              <a:rPr sz="1500">
+                <a:solidFill>
+                  <a:srgbClr val="22282E"/>
+                </a:solidFill>
+              </a:rPr>
+              <a:t>•  Listing: vista de desensamblado con direcciones, bytes y comentarios. Clave: fuente de verdad</a:t>
+            </a:r>
+          </a:p>
+          <a:p>
+            <a:pPr>
+              <a:spcAft>
+                <a:spcPts val="600"/>
+              </a:spcAft>
+            </a:pPr>
+            <a:r>
+              <a:rPr sz="1500">
+                <a:solidFill>
+                  <a:srgbClr val="22282E"/>
+                </a:solidFill>
+              </a:rPr>
+              <a:t>•  cuando el decompilador se equivoca.</a:t>
+            </a:r>
+          </a:p>
+          <a:p>
+            <a:pPr>
+              <a:spcAft>
+                <a:spcPts val="600"/>
+              </a:spcAft>
+            </a:pPr>
+            <a:r>
+              <a:rPr sz="1500">
+                <a:solidFill>
+                  <a:srgbClr val="22282E"/>
+                </a:solidFill>
+              </a:rPr>
+              <a:t>•  Xref (cross-reference): enlace entre una dirección y quienes la referencian. Clave: Ctrl+Shift+F</a:t>
             </a:r>
           </a:p>
         </p:txBody>
@@ -4390,7 +4841,7 @@
                   <a:srgbClr val="0B3D2E"/>
                 </a:solidFill>
               </a:rPr>
-              <a:t>🧪 Laboratorio guiado</a:t>
+              <a:t>📔 Glosario</a:t>
             </a:r>
           </a:p>
         </p:txBody>
@@ -4428,97 +4879,97 @@
                   <a:srgbClr val="22282E"/>
                 </a:solidFill>
               </a:rPr>
-              <a:t>•  Crea un proyecto no compartido (File → New Project), importa el crackme y acepta el auto-análisis.</a:t>
-            </a:r>
-          </a:p>
-          <a:p>
-            <a:pPr>
-              <a:spcAft>
-                <a:spcPts val="600"/>
-              </a:spcAft>
-            </a:pPr>
-            <a:r>
-              <a:rPr sz="1500">
-                <a:solidFill>
-                  <a:srgbClr val="22282E"/>
-                </a:solidFill>
-              </a:rPr>
-              <a:t>•  En el Symbol Tree abre main; observa el panel Decompiler (pseudo-C) junto al Listing.</a:t>
-            </a:r>
-          </a:p>
-          <a:p>
-            <a:pPr>
-              <a:spcAft>
-                <a:spcPts val="600"/>
-              </a:spcAft>
-            </a:pPr>
-            <a:r>
-              <a:rPr sz="1500">
-                <a:solidFill>
-                  <a:srgbClr val="22282E"/>
-                </a:solidFill>
-              </a:rPr>
-              <a:t>•  Localiza la comparación de la clave. Renombra variables genéricas (local28 → input,</a:t>
-            </a:r>
-          </a:p>
-          <a:p>
-            <a:pPr>
-              <a:spcAft>
-                <a:spcPts val="600"/>
-              </a:spcAft>
-            </a:pPr>
-            <a:r>
-              <a:rPr sz="1500">
-                <a:solidFill>
-                  <a:srgbClr val="22282E"/>
-                </a:solidFill>
-              </a:rPr>
-              <a:t>•  uVar1 → len) con L para clarificar la lógica.</a:t>
-            </a:r>
-          </a:p>
-          <a:p>
-            <a:pPr>
-              <a:spcAft>
-                <a:spcPts val="600"/>
-              </a:spcAft>
-            </a:pPr>
-            <a:r>
-              <a:rPr sz="1500">
-                <a:solidFill>
-                  <a:srgbClr val="22282E"/>
-                </a:solidFill>
-              </a:rPr>
-              <a:t>•  Sigue las xrefs de la cadena del prompt: haz doble clic en la string en Defined Strings y usa</a:t>
-            </a:r>
-          </a:p>
-          <a:p>
-            <a:pPr>
-              <a:spcAft>
-                <a:spcPts val="600"/>
-              </a:spcAft>
-            </a:pPr>
-            <a:r>
-              <a:rPr sz="1500">
-                <a:solidFill>
-                  <a:srgbClr val="22282E"/>
-                </a:solidFill>
-              </a:rPr>
-              <a:t>•  References → Show References to.</a:t>
-            </a:r>
-          </a:p>
-          <a:p>
-            <a:pPr>
-              <a:spcAft>
-                <a:spcPts val="600"/>
-              </a:spcAft>
-            </a:pPr>
-            <a:r>
-              <a:rPr sz="1500">
-                <a:solidFill>
-                  <a:srgbClr val="22282E"/>
-                </a:solidFill>
-              </a:rPr>
-              <a:t>•  Retipa un buffer como char[32] para que el decompilador muestre la clave esperada de forma legible.</a:t>
+              <a:t>•  Término — Definición concisa</a:t>
+            </a:r>
+          </a:p>
+          <a:p>
+            <a:pPr>
+              <a:spcAft>
+                <a:spcPts val="600"/>
+              </a:spcAft>
+            </a:pPr>
+            <a:r>
+              <a:rPr sz="1500">
+                <a:solidFill>
+                  <a:srgbClr val="22282E"/>
+                </a:solidFill>
+              </a:rPr>
+              <a:t>•  Ghidra — Suite de RE libre de la NSA, con decompilador</a:t>
+            </a:r>
+          </a:p>
+          <a:p>
+            <a:pPr>
+              <a:spcAft>
+                <a:spcPts val="600"/>
+              </a:spcAft>
+            </a:pPr>
+            <a:r>
+              <a:rPr sz="1500">
+                <a:solidFill>
+                  <a:srgbClr val="22282E"/>
+                </a:solidFill>
+              </a:rPr>
+              <a:t>•  Desensamblar — Mostrar el ensamblador del binario</a:t>
+            </a:r>
+          </a:p>
+          <a:p>
+            <a:pPr>
+              <a:spcAft>
+                <a:spcPts val="600"/>
+              </a:spcAft>
+            </a:pPr>
+            <a:r>
+              <a:rPr sz="1500">
+                <a:solidFill>
+                  <a:srgbClr val="22282E"/>
+                </a:solidFill>
+              </a:rPr>
+              <a:t>•  Decompilar — Reconstruir pseudo-C del código original</a:t>
+            </a:r>
+          </a:p>
+          <a:p>
+            <a:pPr>
+              <a:spcAft>
+                <a:spcPts val="600"/>
+              </a:spcAft>
+            </a:pPr>
+            <a:r>
+              <a:rPr sz="1500">
+                <a:solidFill>
+                  <a:srgbClr val="22282E"/>
+                </a:solidFill>
+              </a:rPr>
+              <a:t>•  Pseudo-C — Aproximación en C que produce el decompilador</a:t>
+            </a:r>
+          </a:p>
+          <a:p>
+            <a:pPr>
+              <a:spcAft>
+                <a:spcPts val="600"/>
+              </a:spcAft>
+            </a:pPr>
+            <a:r>
+              <a:rPr sz="1500">
+                <a:solidFill>
+                  <a:srgbClr val="22282E"/>
+                </a:solidFill>
+              </a:rPr>
+              <a:t>•  Proyecto — Agrupación de binarios en Ghidra</a:t>
+            </a:r>
+          </a:p>
+          <a:p>
+            <a:pPr>
+              <a:spcAft>
+                <a:spcPts val="600"/>
+              </a:spcAft>
+            </a:pPr>
+            <a:r>
+              <a:rPr sz="1500">
+                <a:solidFill>
+                  <a:srgbClr val="22282E"/>
+                </a:solidFill>
+              </a:rPr>
+              <a:t>•  Auto-análisis — Analizadores que identifican funciones y generan la decompilación</a:t>
             </a:r>
           </a:p>
         </p:txBody>
@@ -4569,7 +5020,7 @@
                   <a:srgbClr val="0B3D2E"/>
                 </a:solidFill>
               </a:rPr>
-              <a:t>✍️ Ejercicios</a:t>
+              <a:t>🧰 Herramientas y preparación</a:t>
             </a:r>
           </a:p>
         </p:txBody>
@@ -4607,82 +5058,7 @@
                   <a:srgbClr val="22282E"/>
                 </a:solidFill>
               </a:rPr>
-              <a:t>•  Renombra y comenta main hasta que el pseudo-C sea autoexplicativo.</a:t>
-            </a:r>
-          </a:p>
-          <a:p>
-            <a:pPr>
-              <a:spcAft>
-                <a:spcPts val="600"/>
-              </a:spcAft>
-            </a:pPr>
-            <a:r>
-              <a:rPr sz="1500">
-                <a:solidFill>
-                  <a:srgbClr val="22282E"/>
-                </a:solidFill>
-              </a:rPr>
-              <a:t>•  Define una struct para un objeto que el binario usa y aplícala.</a:t>
-            </a:r>
-          </a:p>
-          <a:p>
-            <a:pPr>
-              <a:spcAft>
-                <a:spcPts val="600"/>
-              </a:spcAft>
-            </a:pPr>
-            <a:r>
-              <a:rPr sz="1500">
-                <a:solidFill>
-                  <a:srgbClr val="22282E"/>
-                </a:solidFill>
-              </a:rPr>
-              <a:t>•  Usa xrefs para encontrar todas las llamadas a la función de validación.</a:t>
-            </a:r>
-          </a:p>
-          <a:p>
-            <a:pPr>
-              <a:spcAft>
-                <a:spcPts val="600"/>
-              </a:spcAft>
-            </a:pPr>
-            <a:r>
-              <a:rPr sz="1500">
-                <a:solidFill>
-                  <a:srgbClr val="22282E"/>
-                </a:solidFill>
-              </a:rPr>
-              <a:t>•  Extrae con un script la lista de imports del binario.</a:t>
-            </a:r>
-          </a:p>
-          <a:p>
-            <a:pPr>
-              <a:spcAft>
-                <a:spcPts val="600"/>
-              </a:spcAft>
-            </a:pPr>
-            <a:r>
-              <a:rPr sz="1500">
-                <a:solidFill>
-                  <a:srgbClr val="22282E"/>
-                </a:solidFill>
-              </a:rPr>
-              <a:t>•  Compara el Listing y el Decompiler en una función donde difieran.</a:t>
-            </a:r>
-          </a:p>
-          <a:p>
-            <a:pPr>
-              <a:spcAft>
-                <a:spcPts val="600"/>
-              </a:spcAft>
-            </a:pPr>
-            <a:r>
-              <a:rPr sz="1500">
-                <a:solidFill>
-                  <a:srgbClr val="22282E"/>
-                </a:solidFill>
-              </a:rPr>
-              <a:t>•  Exporta un informe/anotaciones del análisis.</a:t>
+              <a:t>•  Ten a mano un crackme de práctica (por ejemplo, el de la clase 130).</a:t>
             </a:r>
           </a:p>
         </p:txBody>
@@ -4733,7 +5109,7 @@
                   <a:srgbClr val="0B3D2E"/>
                 </a:solidFill>
               </a:rPr>
-              <a:t>📝 Reto verificable</a:t>
+              <a:t>🧪 Laboratorio guiado</a:t>
             </a:r>
           </a:p>
         </p:txBody>
@@ -4771,52 +5147,97 @@
                   <a:srgbClr val="22282E"/>
                 </a:solidFill>
               </a:rPr>
-              <a:t>•  Usando solo Ghidra (sin ejecutar hasta el final), deduce la clave válida de un crackme y luego</a:t>
-            </a:r>
-          </a:p>
-          <a:p>
-            <a:pPr>
-              <a:spcAft>
-                <a:spcPts val="600"/>
-              </a:spcAft>
-            </a:pPr>
-            <a:r>
-              <a:rPr sz="1500">
-                <a:solidFill>
-                  <a:srgbClr val="22282E"/>
-                </a:solidFill>
-              </a:rPr>
-              <a:t>•  compruébala ejecutándolo.</a:t>
-            </a:r>
-          </a:p>
-          <a:p>
-            <a:pPr>
-              <a:spcAft>
-                <a:spcPts val="600"/>
-              </a:spcAft>
-            </a:pPr>
-            <a:r>
-              <a:rPr sz="1500">
-                <a:solidFill>
-                  <a:srgbClr val="22282E"/>
-                </a:solidFill>
-              </a:rPr>
-              <a:t>•  Criterio de aceptación: el crackme acepta la clave que dedujiste del pseudo-C, y documentas en</a:t>
-            </a:r>
-          </a:p>
-          <a:p>
-            <a:pPr>
-              <a:spcAft>
-                <a:spcPts val="600"/>
-              </a:spcAft>
-            </a:pPr>
-            <a:r>
-              <a:rPr sz="1500">
-                <a:solidFill>
-                  <a:srgbClr val="22282E"/>
-                </a:solidFill>
-              </a:rPr>
-              <a:t>•  comentarios de Ghidra cómo llegaste a ella.</a:t>
+              <a:t>•  Crea un proyecto no compartido (File → New Project), importa el crackme y acepta el auto-análisis.</a:t>
+            </a:r>
+          </a:p>
+          <a:p>
+            <a:pPr>
+              <a:spcAft>
+                <a:spcPts val="600"/>
+              </a:spcAft>
+            </a:pPr>
+            <a:r>
+              <a:rPr sz="1500">
+                <a:solidFill>
+                  <a:srgbClr val="22282E"/>
+                </a:solidFill>
+              </a:rPr>
+              <a:t>•  En el Symbol Tree abre main; observa el panel Decompiler (pseudo-C) junto al Listing.</a:t>
+            </a:r>
+          </a:p>
+          <a:p>
+            <a:pPr>
+              <a:spcAft>
+                <a:spcPts val="600"/>
+              </a:spcAft>
+            </a:pPr>
+            <a:r>
+              <a:rPr sz="1500">
+                <a:solidFill>
+                  <a:srgbClr val="22282E"/>
+                </a:solidFill>
+              </a:rPr>
+              <a:t>•  Localiza la comparación de la clave. Renombra variables genéricas (local28 → input,</a:t>
+            </a:r>
+          </a:p>
+          <a:p>
+            <a:pPr>
+              <a:spcAft>
+                <a:spcPts val="600"/>
+              </a:spcAft>
+            </a:pPr>
+            <a:r>
+              <a:rPr sz="1500">
+                <a:solidFill>
+                  <a:srgbClr val="22282E"/>
+                </a:solidFill>
+              </a:rPr>
+              <a:t>•  uVar1 → len) con L para clarificar la lógica.</a:t>
+            </a:r>
+          </a:p>
+          <a:p>
+            <a:pPr>
+              <a:spcAft>
+                <a:spcPts val="600"/>
+              </a:spcAft>
+            </a:pPr>
+            <a:r>
+              <a:rPr sz="1500">
+                <a:solidFill>
+                  <a:srgbClr val="22282E"/>
+                </a:solidFill>
+              </a:rPr>
+              <a:t>•  Sigue las xrefs de la cadena del prompt: haz doble clic en la string en Defined Strings y usa</a:t>
+            </a:r>
+          </a:p>
+          <a:p>
+            <a:pPr>
+              <a:spcAft>
+                <a:spcPts val="600"/>
+              </a:spcAft>
+            </a:pPr>
+            <a:r>
+              <a:rPr sz="1500">
+                <a:solidFill>
+                  <a:srgbClr val="22282E"/>
+                </a:solidFill>
+              </a:rPr>
+              <a:t>•  References → Show References to.</a:t>
+            </a:r>
+          </a:p>
+          <a:p>
+            <a:pPr>
+              <a:spcAft>
+                <a:spcPts val="600"/>
+              </a:spcAft>
+            </a:pPr>
+            <a:r>
+              <a:rPr sz="1500">
+                <a:solidFill>
+                  <a:srgbClr val="22282E"/>
+                </a:solidFill>
+              </a:rPr>
+              <a:t>•  Retipa un buffer como char[32] para que el decompilador muestre la clave esperada de forma legible.</a:t>
             </a:r>
           </a:p>
         </p:txBody>
